--- a/Planning docs/Slides/lesson-23-1-teacher-slides.pptx
+++ b/Planning docs/Slides/lesson-23-1-teacher-slides.pptx
@@ -5106,7 +5106,7 @@
                 <a:ea typeface="Calibri" pitchFamily="34" charset="-122"/>
                 <a:cs typeface="Calibri" pitchFamily="34" charset="-120"/>
               </a:rPr>
-              <a:t>•  Taking notes from informational text</a:t>
+              <a:t>•  The article says a castle was 'a fortress, a workplace, and a whole community.' What is one piece of evidence that supports the 'whole community' part?</a:t>
             </a:r>
             <a:endParaRPr lang="en-US" sz="1500" dirty="0"/>
           </a:p>
@@ -5123,24 +5123,7 @@
                 <a:ea typeface="Calibri" pitchFamily="34" charset="-122"/>
                 <a:cs typeface="Calibri" pitchFamily="34" charset="-120"/>
               </a:rPr>
-              <a:t>•  Look at the letters around the dot in each word. Count: vowel, consonant, consonant, vowel. That's the VCCV pattern .</a:t>
-            </a:r>
-            <a:endParaRPr lang="en-US" sz="1500" dirty="0"/>
-          </a:p>
-          <a:p>
-            <a:pPr indent="0" marL="0">
-              <a:buNone/>
-            </a:pPr>
-            <a:r>
-              <a:rPr lang="en-US" sz="1500" dirty="0">
-                <a:solidFill>
-                  <a:srgbClr val="1E293B"/>
-                </a:solidFill>
-                <a:latin typeface="Calibri" pitchFamily="34" charset="0"/>
-                <a:ea typeface="Calibri" pitchFamily="34" charset="-122"/>
-                <a:cs typeface="Calibri" pitchFamily="34" charset="-120"/>
-              </a:rPr>
-              <a:t>•  Where does the dot fall — before, between, or after the two consonants?</a:t>
+              <a:t>•  The article mentions pages — young boys training to be knights. How does this connect to what you know from The Whipping Boy ?</a:t>
             </a:r>
             <a:endParaRPr lang="en-US" sz="1500" dirty="0"/>
           </a:p>
